--- a/plans/deck-b2b-prospect.pptx
+++ b/plans/deck-b2b-prospect.pptx
@@ -23,6 +23,9 @@
     <p:sldId id="271" r:id="rId22"/>
     <p:sldId id="272" r:id="rId23"/>
     <p:sldId id="273" r:id="rId24"/>
+    <p:sldId id="274" r:id="rId25"/>
+    <p:sldId id="275" r:id="rId26"/>
+    <p:sldId id="276" r:id="rId27"/>
   </p:sldIdLst>
   <p:sldSz cx="12191695" cy="6858000" type="screen4x3"/>
   <p:notesSz cx="6858000" cy="9144000"/>
@@ -3225,6 +3228,904 @@
                   <a:srgbClr val="1A1A2E"/>
                 </a:solidFill>
               </a:rPr>
+              <a:t>We already know your segment's failure mode</a:t>
+            </a:r>
+          </a:p>
+        </p:txBody>
+      </p:sp>
+      <p:sp>
+        <p:nvSpPr>
+          <p:cNvPr id="3" name="TextBox 2"/>
+          <p:cNvSpPr txBox="1"/>
+          <p:nvPr/>
+        </p:nvSpPr>
+        <p:spPr>
+          <a:xfrm>
+            <a:off x="457200" y="1280160"/>
+            <a:ext cx="11247120" cy="5303520"/>
+          </a:xfrm>
+          <a:prstGeom prst="rect">
+            <a:avLst/>
+          </a:prstGeom>
+          <a:noFill/>
+        </p:spPr>
+        <p:txBody>
+          <a:bodyPr wrap="square">
+            <a:spAutoFit/>
+          </a:bodyPr>
+          <a:lstStyle/>
+          <a:p>
+            <a:pPr algn="l">
+              <a:spcAft>
+                <a:spcPts val="800"/>
+              </a:spcAft>
+            </a:pPr>
+            <a:r>
+              <a:rPr sz="1800"/>
+              <a:t>We don't sell you a generic LMS. We sell you a configuration of one engine to your segment's specific failure mode.</a:t>
+            </a:r>
+          </a:p>
+        </p:txBody>
+      </p:sp>
+      <p:graphicFrame>
+        <p:nvGraphicFramePr>
+          <p:cNvPr id="4" name="Table 3"/>
+          <p:cNvGraphicFramePr>
+            <a:graphicFrameLocks noGrp="1"/>
+          </p:cNvGraphicFramePr>
+          <p:nvPr/>
+        </p:nvGraphicFramePr>
+        <p:xfrm>
+          <a:off x="457200" y="1828800"/>
+          <a:ext cx="11247120" cy="3291840"/>
+        </p:xfrm>
+        <a:graphic>
+          <a:graphicData uri="http://schemas.openxmlformats.org/drawingml/2006/table">
+            <a:tbl>
+              <a:tblPr firstRow="1" bandRow="1">
+                <a:tableStyleId>{5C22544A-7EE6-4342-B048-85BDC9FD1C3A}</a:tableStyleId>
+              </a:tblPr>
+              <a:tblGrid>
+                <a:gridCol w="3749040"/>
+                <a:gridCol w="3749040"/>
+                <a:gridCol w="3749040"/>
+              </a:tblGrid>
+              <a:tr h="411480">
+                <a:tc>
+                  <a:txBody>
+                    <a:bodyPr/>
+                    <a:lstStyle/>
+                    <a:p>
+                      <a:r>
+                        <a:rPr sz="1100" b="1">
+                          <a:solidFill>
+                            <a:srgbClr val="FFFFFF"/>
+                          </a:solidFill>
+                        </a:rPr>
+                        <a:t>Your segment</a:t>
+                      </a:r>
+                    </a:p>
+                  </a:txBody>
+                  <a:tcPr>
+                    <a:solidFill>
+                      <a:srgbClr val="1A1A2E"/>
+                    </a:solidFill>
+                  </a:tcPr>
+                </a:tc>
+                <a:tc>
+                  <a:txBody>
+                    <a:bodyPr/>
+                    <a:lstStyle/>
+                    <a:p>
+                      <a:r>
+                        <a:rPr sz="1100" b="1">
+                          <a:solidFill>
+                            <a:srgbClr val="FFFFFF"/>
+                          </a:solidFill>
+                        </a:rPr>
+                        <a:t>What we already know about your retention / SME problem</a:t>
+                      </a:r>
+                    </a:p>
+                  </a:txBody>
+                  <a:tcPr>
+                    <a:solidFill>
+                      <a:srgbClr val="1A1A2E"/>
+                    </a:solidFill>
+                  </a:tcPr>
+                </a:tc>
+                <a:tc>
+                  <a:txBody>
+                    <a:bodyPr/>
+                    <a:lstStyle/>
+                    <a:p>
+                      <a:r>
+                        <a:rPr sz="1100" b="1">
+                          <a:solidFill>
+                            <a:srgbClr val="FFFFFF"/>
+                          </a:solidFill>
+                        </a:rPr>
+                        <a:t>What we ship</a:t>
+                      </a:r>
+                    </a:p>
+                  </a:txBody>
+                  <a:tcPr>
+                    <a:solidFill>
+                      <a:srgbClr val="1A1A2E"/>
+                    </a:solidFill>
+                  </a:tcPr>
+                </a:tc>
+              </a:tr>
+              <a:tr h="411480">
+                <a:tc>
+                  <a:txBody>
+                    <a:bodyPr/>
+                    <a:lstStyle/>
+                    <a:p>
+                      <a:r>
+                        <a:rPr sz="1100"/>
+                        <a:t>Healthcare frontline / clinical SMEs</a:t>
+                      </a:r>
+                    </a:p>
+                  </a:txBody>
+                  <a:tcPr/>
+                </a:tc>
+                <a:tc>
+                  <a:txBody>
+                    <a:bodyPr/>
+                    <a:lstStyle/>
+                    <a:p>
+                      <a:r>
+                        <a:rPr sz="1100"/>
+                        <a:t>Schedule-poor (10-min between cases); medico-legal liability shadows speech; CME drives seat-time, not transfer</a:t>
+                      </a:r>
+                    </a:p>
+                  </a:txBody>
+                  <a:tcPr/>
+                </a:tc>
+                <a:tc>
+                  <a:txBody>
+                    <a:bodyPr/>
+                    <a:lstStyle/>
+                    <a:p>
+                      <a:r>
+                        <a:rPr sz="1100"/>
+                        <a:t>Voice-first capture + critic-mediated review; Joint Commission / CME outcome reporting built in</a:t>
+                      </a:r>
+                    </a:p>
+                  </a:txBody>
+                  <a:tcPr/>
+                </a:tc>
+              </a:tr>
+              <a:tr h="411480">
+                <a:tc>
+                  <a:txBody>
+                    <a:bodyPr/>
+                    <a:lstStyle/>
+                    <a:p>
+                      <a:r>
+                        <a:rPr sz="1100"/>
+                        <a:t>Financial services / compliance</a:t>
+                      </a:r>
+                    </a:p>
+                  </a:txBody>
+                  <a:tcPr/>
+                </a:tc>
+                <a:tc>
+                  <a:txBody>
+                    <a:bodyPr/>
+                    <a:lstStyle/>
+                    <a:p>
+                      <a:r>
+                        <a:rPr sz="1100"/>
+                        <a:t>Self-paced 18–25% baseline; &lt;70% completion ⇒ 3.5× violation rate (KPI Depot 2026)</a:t>
+                      </a:r>
+                    </a:p>
+                  </a:txBody>
+                  <a:tcPr/>
+                </a:tc>
+                <a:tc>
+                  <a:txBody>
+                    <a:bodyPr/>
+                    <a:lstStyle/>
+                    <a:p>
+                      <a:r>
+                        <a:rPr sz="1100"/>
+                        <a:t>Audit-trail + role-based publish + L4-Kirkpatrick compliance reporting</a:t>
+                      </a:r>
+                    </a:p>
+                  </a:txBody>
+                  <a:tcPr/>
+                </a:tc>
+              </a:tr>
+              <a:tr h="411480">
+                <a:tc>
+                  <a:txBody>
+                    <a:bodyPr/>
+                    <a:lstStyle/>
+                    <a:p>
+                      <a:r>
+                        <a:rPr sz="1100"/>
+                        <a:t>Manufacturing / deskless</a:t>
+                      </a:r>
+                    </a:p>
+                  </a:txBody>
+                  <a:tcPr/>
+                </a:tc>
+                <a:tc>
+                  <a:txBody>
+                    <a:bodyPr/>
+                    <a:lstStyle/>
+                    <a:p>
+                      <a:r>
+                        <a:rPr sz="1100"/>
+                        <a:t>Tacit / haptic knowledge (Polanyi 1966); ≤ 3-min mobile sessions, offline-capable. 90%+ frontline want mobile-first</a:t>
+                      </a:r>
+                    </a:p>
+                  </a:txBody>
+                  <a:tcPr/>
+                </a:tc>
+                <a:tc>
+                  <a:txBody>
+                    <a:bodyPr/>
+                    <a:lstStyle/>
+                    <a:p>
+                      <a:r>
+                        <a:rPr sz="1100"/>
+                        <a:t>Voice-to-text auto-draft for shop-floor SMEs; offline-tolerant mobile</a:t>
+                      </a:r>
+                    </a:p>
+                  </a:txBody>
+                  <a:tcPr/>
+                </a:tc>
+              </a:tr>
+              <a:tr h="411480">
+                <a:tc>
+                  <a:txBody>
+                    <a:bodyPr/>
+                    <a:lstStyle/>
+                    <a:p>
+                      <a:r>
+                        <a:rPr sz="1100"/>
+                        <a:t>Tech / SaaS</a:t>
+                      </a:r>
+                    </a:p>
+                  </a:txBody>
+                  <a:tcPr/>
+                </a:tc>
+                <a:tc>
+                  <a:txBody>
+                    <a:bodyPr/>
+                    <a:lstStyle/>
+                    <a:p>
+                      <a:r>
+                        <a:rPr sz="1100"/>
+                        <a:t>Content stales weekly; SMEs prefer code / README over prose</a:t>
+                      </a:r>
+                    </a:p>
+                  </a:txBody>
+                  <a:tcPr/>
+                </a:tc>
+                <a:tc>
+                  <a:txBody>
+                    <a:bodyPr/>
+                    <a:lstStyle/>
+                    <a:p>
+                      <a:r>
+                        <a:rPr sz="1100"/>
+                        <a:t>Markdown-first authoring + code-block awareness in critic</a:t>
+                      </a:r>
+                    </a:p>
+                  </a:txBody>
+                  <a:tcPr/>
+                </a:tc>
+              </a:tr>
+              <a:tr h="411480">
+                <a:tc>
+                  <a:txBody>
+                    <a:bodyPr/>
+                    <a:lstStyle/>
+                    <a:p>
+                      <a:r>
+                        <a:rPr sz="1100"/>
+                        <a:t>Enterprise distributed-SME</a:t>
+                      </a:r>
+                    </a:p>
+                  </a:txBody>
+                  <a:tcPr/>
+                </a:tc>
+                <a:tc>
+                  <a:txBody>
+                    <a:bodyPr/>
+                    <a:lstStyle/>
+                    <a:p>
+                      <a:r>
+                        <a:rPr sz="1100"/>
+                        <a:t>Multi-language, multi-geo; unclear authoring rights; governance gates</a:t>
+                      </a:r>
+                    </a:p>
+                  </a:txBody>
+                  <a:tcPr/>
+                </a:tc>
+                <a:tc>
+                  <a:txBody>
+                    <a:bodyPr/>
+                    <a:lstStyle/>
+                    <a:p>
+                      <a:r>
+                        <a:rPr sz="1100"/>
+                        <a:t>Role-based publish, multi-language critic, version-pin, audit-trail</a:t>
+                      </a:r>
+                    </a:p>
+                  </a:txBody>
+                  <a:tcPr/>
+                </a:tc>
+              </a:tr>
+              <a:tr h="411480">
+                <a:tc>
+                  <a:txBody>
+                    <a:bodyPr/>
+                    <a:lstStyle/>
+                    <a:p>
+                      <a:r>
+                        <a:rPr sz="1100"/>
+                        <a:t>Single-SME-bottleneck SMB</a:t>
+                      </a:r>
+                    </a:p>
+                  </a:txBody>
+                  <a:tcPr/>
+                </a:tc>
+                <a:tc>
+                  <a:txBody>
+                    <a:bodyPr/>
+                    <a:lstStyle/>
+                    <a:p>
+                      <a:r>
+                        <a:rPr sz="1100"/>
+                        <a:t>Bus-factor 1; no redundancy when SME leaves</a:t>
+                      </a:r>
+                    </a:p>
+                  </a:txBody>
+                  <a:tcPr/>
+                </a:tc>
+                <a:tc>
+                  <a:txBody>
+                    <a:bodyPr/>
+                    <a:lstStyle/>
+                    <a:p>
+                      <a:r>
+                        <a:rPr sz="1100"/>
+                        <a:t>Explicit succession-of-knowledge tooling — CTA + recorded interview + auto-draft</a:t>
+                      </a:r>
+                    </a:p>
+                  </a:txBody>
+                  <a:tcPr/>
+                </a:tc>
+              </a:tr>
+              <a:tr h="411480">
+                <a:tc>
+                  <a:txBody>
+                    <a:bodyPr/>
+                    <a:lstStyle/>
+                    <a:p>
+                      <a:r>
+                        <a:rPr sz="1100"/>
+                        <a:t>High-PDI / face-saving cultures (Japan, Korea, India, MENA, LATAM)</a:t>
+                      </a:r>
+                    </a:p>
+                  </a:txBody>
+                  <a:tcPr/>
+                </a:tc>
+                <a:tc>
+                  <a:txBody>
+                    <a:bodyPr/>
+                    <a:lstStyle/>
+                    <a:p>
+                      <a:r>
+                        <a:rPr sz="1100"/>
+                        <a:t>SMEs reluctant to expose uncertainty in public artefacts</a:t>
+                      </a:r>
+                    </a:p>
+                  </a:txBody>
+                  <a:tcPr/>
+                </a:tc>
+                <a:tc>
+                  <a:txBody>
+                    <a:bodyPr/>
+                    <a:lstStyle/>
+                    <a:p>
+                      <a:r>
+                        <a:rPr sz="1100"/>
+                        <a:t>Leader-endorsed pathway gate; critic copy framed as probe not test; anonymised peer-review surfaces</a:t>
+                      </a:r>
+                    </a:p>
+                  </a:txBody>
+                  <a:tcPr/>
+                </a:tc>
+              </a:tr>
+            </a:tbl>
+          </a:graphicData>
+        </a:graphic>
+      </p:graphicFrame>
+    </p:spTree>
+  </p:cSld>
+  <p:clrMapOvr>
+    <a:masterClrMapping/>
+  </p:clrMapOvr>
+</p:sld>
+</file>
+
+<file path=ppt/slides/slide11.xml><?xml version="1.0" encoding="utf-8"?>
+<p:sld xmlns:a="http://schemas.openxmlformats.org/drawingml/2006/main" xmlns:p="http://schemas.openxmlformats.org/presentationml/2006/main" xmlns:r="http://schemas.openxmlformats.org/officeDocument/2006/relationships">
+  <p:cSld>
+    <p:spTree>
+      <p:nvGrpSpPr>
+        <p:cNvPr id="1" name=""/>
+        <p:cNvGrpSpPr/>
+        <p:nvPr/>
+      </p:nvGrpSpPr>
+      <p:grpSpPr/>
+      <p:sp>
+        <p:nvSpPr>
+          <p:cNvPr id="2" name="TextBox 1"/>
+          <p:cNvSpPr txBox="1"/>
+          <p:nvPr/>
+        </p:nvSpPr>
+        <p:spPr>
+          <a:xfrm>
+            <a:off x="457200" y="274320"/>
+            <a:ext cx="11247120" cy="914400"/>
+          </a:xfrm>
+          <a:prstGeom prst="rect">
+            <a:avLst/>
+          </a:prstGeom>
+          <a:noFill/>
+        </p:spPr>
+        <p:txBody>
+          <a:bodyPr wrap="square">
+            <a:spAutoFit/>
+          </a:bodyPr>
+          <a:lstStyle/>
+          <a:p>
+            <a:pPr algn="l"/>
+            <a:r>
+              <a:rPr sz="2800" b="1">
+                <a:solidFill>
+                  <a:srgbClr val="1A1A2E"/>
+                </a:solidFill>
+              </a:rPr>
+              <a:t>Security &amp; compliance</a:t>
+            </a:r>
+          </a:p>
+        </p:txBody>
+      </p:sp>
+      <p:sp>
+        <p:nvSpPr>
+          <p:cNvPr id="3" name="TextBox 2"/>
+          <p:cNvSpPr txBox="1"/>
+          <p:nvPr/>
+        </p:nvSpPr>
+        <p:spPr>
+          <a:xfrm>
+            <a:off x="457200" y="1280160"/>
+            <a:ext cx="11247120" cy="5303520"/>
+          </a:xfrm>
+          <a:prstGeom prst="rect">
+            <a:avLst/>
+          </a:prstGeom>
+          <a:noFill/>
+        </p:spPr>
+        <p:txBody>
+          <a:bodyPr wrap="square">
+            <a:spAutoFit/>
+          </a:bodyPr>
+          <a:lstStyle/>
+          <a:p/>
+        </p:txBody>
+      </p:sp>
+      <p:graphicFrame>
+        <p:nvGraphicFramePr>
+          <p:cNvPr id="4" name="Table 3"/>
+          <p:cNvGraphicFramePr>
+            <a:graphicFrameLocks noGrp="1"/>
+          </p:cNvGraphicFramePr>
+          <p:nvPr/>
+        </p:nvGraphicFramePr>
+        <p:xfrm>
+          <a:off x="457200" y="1828800"/>
+          <a:ext cx="11247120" cy="3291840"/>
+        </p:xfrm>
+        <a:graphic>
+          <a:graphicData uri="http://schemas.openxmlformats.org/drawingml/2006/table">
+            <a:tbl>
+              <a:tblPr firstRow="1" bandRow="1">
+                <a:tableStyleId>{5C22544A-7EE6-4342-B048-85BDC9FD1C3A}</a:tableStyleId>
+              </a:tblPr>
+              <a:tblGrid>
+                <a:gridCol w="5623560"/>
+                <a:gridCol w="5623560"/>
+              </a:tblGrid>
+              <a:tr h="411480">
+                <a:tc>
+                  <a:txBody>
+                    <a:bodyPr/>
+                    <a:lstStyle/>
+                    <a:p/>
+                  </a:txBody>
+                  <a:tcPr>
+                    <a:solidFill>
+                      <a:srgbClr val="1A1A2E"/>
+                    </a:solidFill>
+                  </a:tcPr>
+                </a:tc>
+                <a:tc>
+                  <a:txBody>
+                    <a:bodyPr/>
+                    <a:lstStyle/>
+                    <a:p>
+                      <a:r>
+                        <a:rPr sz="1100" b="1">
+                          <a:solidFill>
+                            <a:srgbClr val="FFFFFF"/>
+                          </a:solidFill>
+                        </a:rPr>
+                        <a:t>What we do</a:t>
+                      </a:r>
+                    </a:p>
+                  </a:txBody>
+                  <a:tcPr>
+                    <a:solidFill>
+                      <a:srgbClr val="1A1A2E"/>
+                    </a:solidFill>
+                  </a:tcPr>
+                </a:tc>
+              </a:tr>
+              <a:tr h="411480">
+                <a:tc>
+                  <a:txBody>
+                    <a:bodyPr/>
+                    <a:lstStyle/>
+                    <a:p>
+                      <a:r>
+                        <a:rPr sz="1100"/>
+                        <a:t>Tenant isolation</a:t>
+                      </a:r>
+                    </a:p>
+                  </a:txBody>
+                  <a:tcPr/>
+                </a:tc>
+                <a:tc>
+                  <a:txBody>
+                    <a:bodyPr/>
+                    <a:lstStyle/>
+                    <a:p>
+                      <a:r>
+                        <a:rPr sz="1100"/>
+                        <a:t>Postgres row-level security; every query carries your tenant context; verified by integration test</a:t>
+                      </a:r>
+                    </a:p>
+                  </a:txBody>
+                  <a:tcPr/>
+                </a:tc>
+              </a:tr>
+              <a:tr h="411480">
+                <a:tc>
+                  <a:txBody>
+                    <a:bodyPr/>
+                    <a:lstStyle/>
+                    <a:p>
+                      <a:r>
+                        <a:rPr sz="1100"/>
+                        <a:t>Audit log</a:t>
+                      </a:r>
+                    </a:p>
+                  </a:txBody>
+                  <a:tcPr/>
+                </a:tc>
+                <a:tc>
+                  <a:txBody>
+                    <a:bodyPr/>
+                    <a:lstStyle/>
+                    <a:p>
+                      <a:r>
+                        <a:rPr sz="1100"/>
+                        <a:t>Every publish, edit, and rejection is logged with author, timestamp, and reason</a:t>
+                      </a:r>
+                    </a:p>
+                  </a:txBody>
+                  <a:tcPr/>
+                </a:tc>
+              </a:tr>
+              <a:tr h="411480">
+                <a:tc>
+                  <a:txBody>
+                    <a:bodyPr/>
+                    <a:lstStyle/>
+                    <a:p>
+                      <a:r>
+                        <a:rPr sz="1100"/>
+                        <a:t>Data export</a:t>
+                      </a:r>
+                    </a:p>
+                  </a:txBody>
+                  <a:tcPr/>
+                </a:tc>
+                <a:tc>
+                  <a:txBody>
+                    <a:bodyPr/>
+                    <a:lstStyle/>
+                    <a:p>
+                      <a:r>
+                        <a:rPr sz="1100"/>
+                        <a:t>Self-serve CSV / JSON export of your tenant's content and learner progress</a:t>
+                      </a:r>
+                    </a:p>
+                  </a:txBody>
+                  <a:tcPr/>
+                </a:tc>
+              </a:tr>
+              <a:tr h="411480">
+                <a:tc>
+                  <a:txBody>
+                    <a:bodyPr/>
+                    <a:lstStyle/>
+                    <a:p>
+                      <a:r>
+                        <a:rPr sz="1100"/>
+                        <a:t>Soft delete</a:t>
+                      </a:r>
+                    </a:p>
+                  </a:txBody>
+                  <a:tcPr/>
+                </a:tc>
+                <a:tc>
+                  <a:txBody>
+                    <a:bodyPr/>
+                    <a:lstStyle/>
+                    <a:p>
+                      <a:r>
+                        <a:rPr sz="1100"/>
+                        <a:t>Nothing is hard-deleted for 90 days; recoverable on request</a:t>
+                      </a:r>
+                    </a:p>
+                  </a:txBody>
+                  <a:tcPr/>
+                </a:tc>
+              </a:tr>
+              <a:tr h="411480">
+                <a:tc>
+                  <a:txBody>
+                    <a:bodyPr/>
+                    <a:lstStyle/>
+                    <a:p>
+                      <a:r>
+                        <a:rPr sz="1100"/>
+                        <a:t>AI provenance</a:t>
+                      </a:r>
+                    </a:p>
+                  </a:txBody>
+                  <a:tcPr/>
+                </a:tc>
+                <a:tc>
+                  <a:txBody>
+                    <a:bodyPr/>
+                    <a:lstStyle/>
+                    <a:p>
+                      <a:r>
+                        <a:rPr sz="1100"/>
+                        <a:t>Every published piece records its drafter, reviewer, validator results, and SME-approval evidence</a:t>
+                      </a:r>
+                    </a:p>
+                  </a:txBody>
+                  <a:tcPr/>
+                </a:tc>
+              </a:tr>
+              <a:tr h="411480">
+                <a:tc>
+                  <a:txBody>
+                    <a:bodyPr/>
+                    <a:lstStyle/>
+                    <a:p>
+                      <a:r>
+                        <a:rPr sz="1100"/>
+                        <a:t>SOC2</a:t>
+                      </a:r>
+                    </a:p>
+                  </a:txBody>
+                  <a:tcPr/>
+                </a:tc>
+                <a:tc>
+                  <a:txBody>
+                    <a:bodyPr/>
+                    <a:lstStyle/>
+                    <a:p>
+                      <a:r>
+                        <a:rPr sz="1100"/>
+                        <a:t>On the roadmap — formal audit triggered at 5 enterprise tenants. We can share our control matrix today.</a:t>
+                      </a:r>
+                    </a:p>
+                  </a:txBody>
+                  <a:tcPr/>
+                </a:tc>
+              </a:tr>
+              <a:tr h="411480">
+                <a:tc>
+                  <a:txBody>
+                    <a:bodyPr/>
+                    <a:lstStyle/>
+                    <a:p>
+                      <a:r>
+                        <a:rPr sz="1100"/>
+                        <a:t>GDPR</a:t>
+                      </a:r>
+                    </a:p>
+                  </a:txBody>
+                  <a:tcPr/>
+                </a:tc>
+                <a:tc>
+                  <a:txBody>
+                    <a:bodyPr/>
+                    <a:lstStyle/>
+                    <a:p>
+                      <a:r>
+                        <a:rPr sz="1100"/>
+                        <a:t>Designed in (data-export, right-to-be-forgotten); EU hosting available</a:t>
+                      </a:r>
+                    </a:p>
+                  </a:txBody>
+                  <a:tcPr/>
+                </a:tc>
+              </a:tr>
+            </a:tbl>
+          </a:graphicData>
+        </a:graphic>
+      </p:graphicFrame>
+    </p:spTree>
+  </p:cSld>
+  <p:clrMapOvr>
+    <a:masterClrMapping/>
+  </p:clrMapOvr>
+</p:sld>
+</file>
+
+<file path=ppt/slides/slide12.xml><?xml version="1.0" encoding="utf-8"?>
+<p:sld xmlns:a="http://schemas.openxmlformats.org/drawingml/2006/main" xmlns:p="http://schemas.openxmlformats.org/presentationml/2006/main" xmlns:r="http://schemas.openxmlformats.org/officeDocument/2006/relationships">
+  <p:cSld>
+    <p:spTree>
+      <p:nvGrpSpPr>
+        <p:cNvPr id="1" name=""/>
+        <p:cNvGrpSpPr/>
+        <p:nvPr/>
+      </p:nvGrpSpPr>
+      <p:grpSpPr/>
+      <p:sp>
+        <p:nvSpPr>
+          <p:cNvPr id="2" name="TextBox 1"/>
+          <p:cNvSpPr txBox="1"/>
+          <p:nvPr/>
+        </p:nvSpPr>
+        <p:spPr>
+          <a:xfrm>
+            <a:off x="457200" y="274320"/>
+            <a:ext cx="11247120" cy="914400"/>
+          </a:xfrm>
+          <a:prstGeom prst="rect">
+            <a:avLst/>
+          </a:prstGeom>
+          <a:noFill/>
+        </p:spPr>
+        <p:txBody>
+          <a:bodyPr wrap="square">
+            <a:spAutoFit/>
+          </a:bodyPr>
+          <a:lstStyle/>
+          <a:p>
+            <a:pPr algn="l"/>
+            <a:r>
+              <a:rPr sz="2800" b="1">
+                <a:solidFill>
+                  <a:srgbClr val="1A1A2E"/>
+                </a:solidFill>
+              </a:rPr>
+              <a:t>Single sign-on &amp; integration</a:t>
+            </a:r>
+          </a:p>
+        </p:txBody>
+      </p:sp>
+      <p:sp>
+        <p:nvSpPr>
+          <p:cNvPr id="3" name="TextBox 2"/>
+          <p:cNvSpPr txBox="1"/>
+          <p:nvPr/>
+        </p:nvSpPr>
+        <p:spPr>
+          <a:xfrm>
+            <a:off x="457200" y="1280160"/>
+            <a:ext cx="11247120" cy="5303520"/>
+          </a:xfrm>
+          <a:prstGeom prst="rect">
+            <a:avLst/>
+          </a:prstGeom>
+          <a:noFill/>
+        </p:spPr>
+        <p:txBody>
+          <a:bodyPr wrap="square">
+            <a:spAutoFit/>
+          </a:bodyPr>
+          <a:lstStyle/>
+          <a:p>
+            <a:pPr/>
+            <a:r>
+              <a:rPr sz="1600"/>
+              <a:t>Clerk Enterprise — SAML, SCIM, OIDC. Your IT team configures once.</a:t>
+            </a:r>
+          </a:p>
+          <a:p>
+            <a:pPr/>
+            <a:r>
+              <a:rPr sz="1600"/>
+              <a:t>Webhooks — completion events to your HRIS / Workday / BambooHR.</a:t>
+            </a:r>
+          </a:p>
+          <a:p>
+            <a:pPr>
+              <a:spcAft>
+                <a:spcPts val="600"/>
+              </a:spcAft>
+            </a:pPr>
+            <a:r>
+              <a:rPr sz="1600"/>
+              <a:t>API — read-only export endpoints for your data warehouse.</a:t>
+            </a:r>
+          </a:p>
+        </p:txBody>
+      </p:sp>
+    </p:spTree>
+  </p:cSld>
+  <p:clrMapOvr>
+    <a:masterClrMapping/>
+  </p:clrMapOvr>
+</p:sld>
+</file>
+
+<file path=ppt/slides/slide13.xml><?xml version="1.0" encoding="utf-8"?>
+<p:sld xmlns:a="http://schemas.openxmlformats.org/drawingml/2006/main" xmlns:p="http://schemas.openxmlformats.org/presentationml/2006/main" xmlns:r="http://schemas.openxmlformats.org/officeDocument/2006/relationships">
+  <p:cSld>
+    <p:spTree>
+      <p:nvGrpSpPr>
+        <p:cNvPr id="1" name=""/>
+        <p:cNvGrpSpPr/>
+        <p:nvPr/>
+      </p:nvGrpSpPr>
+      <p:grpSpPr/>
+      <p:sp>
+        <p:nvSpPr>
+          <p:cNvPr id="2" name="TextBox 1"/>
+          <p:cNvSpPr txBox="1"/>
+          <p:nvPr/>
+        </p:nvSpPr>
+        <p:spPr>
+          <a:xfrm>
+            <a:off x="457200" y="274320"/>
+            <a:ext cx="11247120" cy="914400"/>
+          </a:xfrm>
+          <a:prstGeom prst="rect">
+            <a:avLst/>
+          </a:prstGeom>
+          <a:noFill/>
+        </p:spPr>
+        <p:txBody>
+          <a:bodyPr wrap="square">
+            <a:spAutoFit/>
+          </a:bodyPr>
+          <a:lstStyle/>
+          <a:p>
+            <a:pPr algn="l"/>
+            <a:r>
+              <a:rPr sz="2800" b="1">
+                <a:solidFill>
+                  <a:srgbClr val="1A1A2E"/>
+                </a:solidFill>
+              </a:rPr>
               <a:t>Pilot offer</a:t>
             </a:r>
           </a:p>
@@ -3493,7 +4394,7 @@
                     <a:p>
                       <a:r>
                         <a:rPr sz="1100"/>
-                        <a:t>≥70% of seats complete ≥1 lesson; SME approval cycle &lt; 48h; ≥1 internally requested topic delivered</a:t>
+                        <a:t>≥70% of seats complete ≥1 lesson; SME approval cycle &lt; 48h; ≥1 internally requested topic delivered; ≥ 1 percentage-point calibration-Δ improvement on participating cohort by pilot end (the L2-Kirkpatrick learning-outcome anchor)</a:t>
                       </a:r>
                     </a:p>
                   </a:txBody>
@@ -3512,7 +4413,7 @@
 </p:sld>
 </file>
 
-<file path=ppt/slides/slide11.xml><?xml version="1.0" encoding="utf-8"?>
+<file path=ppt/slides/slide14.xml><?xml version="1.0" encoding="utf-8"?>
 <p:sld xmlns:a="http://schemas.openxmlformats.org/drawingml/2006/main" xmlns:p="http://schemas.openxmlformats.org/presentationml/2006/main" xmlns:r="http://schemas.openxmlformats.org/officeDocument/2006/relationships">
   <p:cSld>
     <p:spTree>
@@ -3824,7 +4725,7 @@
 </p:sld>
 </file>
 
-<file path=ppt/slides/slide12.xml><?xml version="1.0" encoding="utf-8"?>
+<file path=ppt/slides/slide15.xml><?xml version="1.0" encoding="utf-8"?>
 <p:sld xmlns:a="http://schemas.openxmlformats.org/drawingml/2006/main" xmlns:p="http://schemas.openxmlformats.org/presentationml/2006/main" xmlns:r="http://schemas.openxmlformats.org/officeDocument/2006/relationships">
   <p:cSld>
     <p:spTree>
@@ -4166,7 +5067,7 @@
 </p:sld>
 </file>
 
-<file path=ppt/slides/slide13.xml><?xml version="1.0" encoding="utf-8"?>
+<file path=ppt/slides/slide16.xml><?xml version="1.0" encoding="utf-8"?>
 <p:sld xmlns:a="http://schemas.openxmlformats.org/drawingml/2006/main" xmlns:p="http://schemas.openxmlformats.org/presentationml/2006/main" xmlns:r="http://schemas.openxmlformats.org/officeDocument/2006/relationships">
   <p:cSld>
     <p:spTree>
@@ -4530,7 +5431,7 @@
 </p:sld>
 </file>
 
-<file path=ppt/slides/slide14.xml><?xml version="1.0" encoding="utf-8"?>
+<file path=ppt/slides/slide17.xml><?xml version="1.0" encoding="utf-8"?>
 <p:sld xmlns:a="http://schemas.openxmlformats.org/drawingml/2006/main" xmlns:p="http://schemas.openxmlformats.org/presentationml/2006/main" xmlns:r="http://schemas.openxmlformats.org/officeDocument/2006/relationships">
   <p:cSld>
     <p:spTree>
@@ -4894,7 +5795,7 @@
 </p:sld>
 </file>
 
-<file path=ppt/slides/slide15.xml><?xml version="1.0" encoding="utf-8"?>
+<file path=ppt/slides/slide18.xml><?xml version="1.0" encoding="utf-8"?>
 <p:sld xmlns:a="http://schemas.openxmlformats.org/drawingml/2006/main" xmlns:p="http://schemas.openxmlformats.org/presentationml/2006/main" xmlns:r="http://schemas.openxmlformats.org/officeDocument/2006/relationships">
   <p:cSld>
     <p:spTree>
@@ -4974,7 +5875,7 @@
             <a:pPr/>
             <a:r>
               <a:rPr sz="1600"/>
-              <a:t>One named SME with ~10 minutes/day for content review (we minimise this aggressively).</a:t>
+              <a:t>One named SME with ~10 minutes/day for content review using our 5-probe intake — no narrative writing required. The intake structures the SME's expertise into novice-error / one-principle / worked-example pair / boundary case / nearest confusable. Each concept ships with a worked example AND a faded variant by default.</a:t>
             </a:r>
           </a:p>
           <a:p>
@@ -5023,7 +5924,7 @@
 </p:sld>
 </file>
 
-<file path=ppt/slides/slide16.xml><?xml version="1.0" encoding="utf-8"?>
+<file path=ppt/slides/slide19.xml><?xml version="1.0" encoding="utf-8"?>
 <p:sld xmlns:a="http://schemas.openxmlformats.org/drawingml/2006/main" xmlns:p="http://schemas.openxmlformats.org/presentationml/2006/main" xmlns:r="http://schemas.openxmlformats.org/officeDocument/2006/relationships">
   <p:cSld>
     <p:spTree>
@@ -5130,229 +6031,6 @@
             <a:r>
               <a:rPr sz="1800"/>
               <a:t>"Can we run this air-gapped / on-prem?" Not in v1. On-prem is on the 18-month roadmap if 3+ enterprise prospects request it.</a:t>
-            </a:r>
-          </a:p>
-        </p:txBody>
-      </p:sp>
-    </p:spTree>
-  </p:cSld>
-  <p:clrMapOvr>
-    <a:masterClrMapping/>
-  </p:clrMapOvr>
-</p:sld>
-</file>
-
-<file path=ppt/slides/slide17.xml><?xml version="1.0" encoding="utf-8"?>
-<p:sld xmlns:a="http://schemas.openxmlformats.org/drawingml/2006/main" xmlns:p="http://schemas.openxmlformats.org/presentationml/2006/main" xmlns:r="http://schemas.openxmlformats.org/officeDocument/2006/relationships">
-  <p:cSld>
-    <p:spTree>
-      <p:nvGrpSpPr>
-        <p:cNvPr id="1" name=""/>
-        <p:cNvGrpSpPr/>
-        <p:nvPr/>
-      </p:nvGrpSpPr>
-      <p:grpSpPr/>
-      <p:sp>
-        <p:nvSpPr>
-          <p:cNvPr id="2" name="TextBox 1"/>
-          <p:cNvSpPr txBox="1"/>
-          <p:nvPr/>
-        </p:nvSpPr>
-        <p:spPr>
-          <a:xfrm>
-            <a:off x="457200" y="274320"/>
-            <a:ext cx="11247120" cy="914400"/>
-          </a:xfrm>
-          <a:prstGeom prst="rect">
-            <a:avLst/>
-          </a:prstGeom>
-          <a:noFill/>
-        </p:spPr>
-        <p:txBody>
-          <a:bodyPr wrap="square">
-            <a:spAutoFit/>
-          </a:bodyPr>
-          <a:lstStyle/>
-          <a:p>
-            <a:pPr algn="l"/>
-            <a:r>
-              <a:rPr sz="2800" b="1">
-                <a:solidFill>
-                  <a:srgbClr val="1A1A2E"/>
-                </a:solidFill>
-              </a:rPr>
-              <a:t>Next step</a:t>
-            </a:r>
-          </a:p>
-        </p:txBody>
-      </p:sp>
-      <p:sp>
-        <p:nvSpPr>
-          <p:cNvPr id="3" name="TextBox 2"/>
-          <p:cNvSpPr txBox="1"/>
-          <p:nvPr/>
-        </p:nvSpPr>
-        <p:spPr>
-          <a:xfrm>
-            <a:off x="457200" y="1280160"/>
-            <a:ext cx="11247120" cy="5303520"/>
-          </a:xfrm>
-          <a:prstGeom prst="rect">
-            <a:avLst/>
-          </a:prstGeom>
-          <a:noFill/>
-        </p:spPr>
-        <p:txBody>
-          <a:bodyPr wrap="square">
-            <a:spAutoFit/>
-          </a:bodyPr>
-          <a:lstStyle/>
-          <a:p>
-            <a:pPr algn="l">
-              <a:spcAft>
-                <a:spcPts val="800"/>
-              </a:spcAft>
-            </a:pPr>
-            <a:r>
-              <a:rPr sz="1800"/>
-              <a:t>A 30-minute scoping call to determine:</a:t>
-            </a:r>
-          </a:p>
-          <a:p>
-            <a:pPr/>
-            <a:r>
-              <a:rPr sz="1600"/>
-              <a:t>Which 1–3 catalogs would matter most to your team?</a:t>
-            </a:r>
-          </a:p>
-          <a:p>
-            <a:pPr/>
-            <a:r>
-              <a:rPr sz="1600"/>
-              <a:t>Who would be your SME?</a:t>
-            </a:r>
-          </a:p>
-          <a:p>
-            <a:pPr>
-              <a:spcAft>
-                <a:spcPts val="600"/>
-              </a:spcAft>
-            </a:pPr>
-            <a:r>
-              <a:rPr sz="1600"/>
-              <a:t>What does pilot success look like to you?</a:t>
-            </a:r>
-          </a:p>
-          <a:p>
-            <a:pPr algn="l">
-              <a:spcAft>
-                <a:spcPts val="800"/>
-              </a:spcAft>
-            </a:pPr>
-            <a:r>
-              <a:rPr sz="1800"/>
-              <a:t>If we agree it's worth a pilot, we send an LOI within 48 hours.</a:t>
-            </a:r>
-          </a:p>
-          <a:p>
-            <a:pPr algn="l">
-              <a:spcAft>
-                <a:spcPts val="800"/>
-              </a:spcAft>
-            </a:pPr>
-            <a:r>
-              <a:rPr sz="1800"/>
-              <a:t>Contact: [operator email] • [scheduling link]</a:t>
-            </a:r>
-          </a:p>
-        </p:txBody>
-      </p:sp>
-    </p:spTree>
-  </p:cSld>
-  <p:clrMapOvr>
-    <a:masterClrMapping/>
-  </p:clrMapOvr>
-</p:sld>
-</file>
-
-<file path=ppt/slides/slide18.xml><?xml version="1.0" encoding="utf-8"?>
-<p:sld xmlns:a="http://schemas.openxmlformats.org/drawingml/2006/main" xmlns:p="http://schemas.openxmlformats.org/presentationml/2006/main" xmlns:r="http://schemas.openxmlformats.org/officeDocument/2006/relationships">
-  <p:cSld>
-    <p:spTree>
-      <p:nvGrpSpPr>
-        <p:cNvPr id="1" name=""/>
-        <p:cNvGrpSpPr/>
-        <p:nvPr/>
-      </p:nvGrpSpPr>
-      <p:grpSpPr/>
-      <p:sp>
-        <p:nvSpPr>
-          <p:cNvPr id="2" name="TextBox 1"/>
-          <p:cNvSpPr txBox="1"/>
-          <p:nvPr/>
-        </p:nvSpPr>
-        <p:spPr>
-          <a:xfrm>
-            <a:off x="457200" y="274320"/>
-            <a:ext cx="11247120" cy="914400"/>
-          </a:xfrm>
-          <a:prstGeom prst="rect">
-            <a:avLst/>
-          </a:prstGeom>
-          <a:noFill/>
-        </p:spPr>
-        <p:txBody>
-          <a:bodyPr wrap="square">
-            <a:spAutoFit/>
-          </a:bodyPr>
-          <a:lstStyle/>
-          <a:p>
-            <a:pPr algn="l"/>
-            <a:r>
-              <a:rPr sz="2800" b="1">
-                <a:solidFill>
-                  <a:srgbClr val="1A1A2E"/>
-                </a:solidFill>
-              </a:rPr>
-              <a:t>In one sentence</a:t>
-            </a:r>
-          </a:p>
-        </p:txBody>
-      </p:sp>
-      <p:sp>
-        <p:nvSpPr>
-          <p:cNvPr id="3" name="TextBox 2"/>
-          <p:cNvSpPr txBox="1"/>
-          <p:nvPr/>
-        </p:nvSpPr>
-        <p:spPr>
-          <a:xfrm>
-            <a:off x="457200" y="1280160"/>
-            <a:ext cx="11247120" cy="5303520"/>
-          </a:xfrm>
-          <a:prstGeom prst="rect">
-            <a:avLst/>
-          </a:prstGeom>
-          <a:noFill/>
-        </p:spPr>
-        <p:txBody>
-          <a:bodyPr wrap="square">
-            <a:spAutoFit/>
-          </a:bodyPr>
-          <a:lstStyle/>
-          <a:p>
-            <a:pPr>
-              <a:spcAft>
-                <a:spcPts val="600"/>
-              </a:spcAft>
-            </a:pPr>
-            <a:r>
-              <a:rPr sz="1800" i="1">
-                <a:solidFill>
-                  <a:srgbClr val="4A4A6E"/>
-                </a:solidFill>
-              </a:rPr>
-              <a:t>Your topics, drafted by AI, reviewed by your expert, learned by your team — at one-tenth the cost of doing it yourself.</a:t>
             </a:r>
           </a:p>
         </p:txBody>
@@ -5450,6 +6128,229 @@
             <a:r>
               <a:rPr sz="1800"/>
               <a:t>For: [Prospect Company] • Function: [HR / L&amp;D / Compliance / Engineering Onboarding]</a:t>
+            </a:r>
+          </a:p>
+        </p:txBody>
+      </p:sp>
+    </p:spTree>
+  </p:cSld>
+  <p:clrMapOvr>
+    <a:masterClrMapping/>
+  </p:clrMapOvr>
+</p:sld>
+</file>
+
+<file path=ppt/slides/slide20.xml><?xml version="1.0" encoding="utf-8"?>
+<p:sld xmlns:a="http://schemas.openxmlformats.org/drawingml/2006/main" xmlns:p="http://schemas.openxmlformats.org/presentationml/2006/main" xmlns:r="http://schemas.openxmlformats.org/officeDocument/2006/relationships">
+  <p:cSld>
+    <p:spTree>
+      <p:nvGrpSpPr>
+        <p:cNvPr id="1" name=""/>
+        <p:cNvGrpSpPr/>
+        <p:nvPr/>
+      </p:nvGrpSpPr>
+      <p:grpSpPr/>
+      <p:sp>
+        <p:nvSpPr>
+          <p:cNvPr id="2" name="TextBox 1"/>
+          <p:cNvSpPr txBox="1"/>
+          <p:nvPr/>
+        </p:nvSpPr>
+        <p:spPr>
+          <a:xfrm>
+            <a:off x="457200" y="274320"/>
+            <a:ext cx="11247120" cy="914400"/>
+          </a:xfrm>
+          <a:prstGeom prst="rect">
+            <a:avLst/>
+          </a:prstGeom>
+          <a:noFill/>
+        </p:spPr>
+        <p:txBody>
+          <a:bodyPr wrap="square">
+            <a:spAutoFit/>
+          </a:bodyPr>
+          <a:lstStyle/>
+          <a:p>
+            <a:pPr algn="l"/>
+            <a:r>
+              <a:rPr sz="2800" b="1">
+                <a:solidFill>
+                  <a:srgbClr val="1A1A2E"/>
+                </a:solidFill>
+              </a:rPr>
+              <a:t>Next step</a:t>
+            </a:r>
+          </a:p>
+        </p:txBody>
+      </p:sp>
+      <p:sp>
+        <p:nvSpPr>
+          <p:cNvPr id="3" name="TextBox 2"/>
+          <p:cNvSpPr txBox="1"/>
+          <p:nvPr/>
+        </p:nvSpPr>
+        <p:spPr>
+          <a:xfrm>
+            <a:off x="457200" y="1280160"/>
+            <a:ext cx="11247120" cy="5303520"/>
+          </a:xfrm>
+          <a:prstGeom prst="rect">
+            <a:avLst/>
+          </a:prstGeom>
+          <a:noFill/>
+        </p:spPr>
+        <p:txBody>
+          <a:bodyPr wrap="square">
+            <a:spAutoFit/>
+          </a:bodyPr>
+          <a:lstStyle/>
+          <a:p>
+            <a:pPr algn="l">
+              <a:spcAft>
+                <a:spcPts val="800"/>
+              </a:spcAft>
+            </a:pPr>
+            <a:r>
+              <a:rPr sz="1800"/>
+              <a:t>A 30-minute scoping call to determine:</a:t>
+            </a:r>
+          </a:p>
+          <a:p>
+            <a:pPr/>
+            <a:r>
+              <a:rPr sz="1600"/>
+              <a:t>Which 1–3 catalogs would matter most to your team?</a:t>
+            </a:r>
+          </a:p>
+          <a:p>
+            <a:pPr/>
+            <a:r>
+              <a:rPr sz="1600"/>
+              <a:t>Who would be your SME?</a:t>
+            </a:r>
+          </a:p>
+          <a:p>
+            <a:pPr>
+              <a:spcAft>
+                <a:spcPts val="600"/>
+              </a:spcAft>
+            </a:pPr>
+            <a:r>
+              <a:rPr sz="1600"/>
+              <a:t>What does pilot success look like to you?</a:t>
+            </a:r>
+          </a:p>
+          <a:p>
+            <a:pPr algn="l">
+              <a:spcAft>
+                <a:spcPts val="800"/>
+              </a:spcAft>
+            </a:pPr>
+            <a:r>
+              <a:rPr sz="1800"/>
+              <a:t>If we agree it's worth a pilot, we send an LOI within 48 hours.</a:t>
+            </a:r>
+          </a:p>
+          <a:p>
+            <a:pPr algn="l">
+              <a:spcAft>
+                <a:spcPts val="800"/>
+              </a:spcAft>
+            </a:pPr>
+            <a:r>
+              <a:rPr sz="1800"/>
+              <a:t>Contact: [operator email] • [scheduling link]</a:t>
+            </a:r>
+          </a:p>
+        </p:txBody>
+      </p:sp>
+    </p:spTree>
+  </p:cSld>
+  <p:clrMapOvr>
+    <a:masterClrMapping/>
+  </p:clrMapOvr>
+</p:sld>
+</file>
+
+<file path=ppt/slides/slide21.xml><?xml version="1.0" encoding="utf-8"?>
+<p:sld xmlns:a="http://schemas.openxmlformats.org/drawingml/2006/main" xmlns:p="http://schemas.openxmlformats.org/presentationml/2006/main" xmlns:r="http://schemas.openxmlformats.org/officeDocument/2006/relationships">
+  <p:cSld>
+    <p:spTree>
+      <p:nvGrpSpPr>
+        <p:cNvPr id="1" name=""/>
+        <p:cNvGrpSpPr/>
+        <p:nvPr/>
+      </p:nvGrpSpPr>
+      <p:grpSpPr/>
+      <p:sp>
+        <p:nvSpPr>
+          <p:cNvPr id="2" name="TextBox 1"/>
+          <p:cNvSpPr txBox="1"/>
+          <p:nvPr/>
+        </p:nvSpPr>
+        <p:spPr>
+          <a:xfrm>
+            <a:off x="457200" y="274320"/>
+            <a:ext cx="11247120" cy="914400"/>
+          </a:xfrm>
+          <a:prstGeom prst="rect">
+            <a:avLst/>
+          </a:prstGeom>
+          <a:noFill/>
+        </p:spPr>
+        <p:txBody>
+          <a:bodyPr wrap="square">
+            <a:spAutoFit/>
+          </a:bodyPr>
+          <a:lstStyle/>
+          <a:p>
+            <a:pPr algn="l"/>
+            <a:r>
+              <a:rPr sz="2800" b="1">
+                <a:solidFill>
+                  <a:srgbClr val="1A1A2E"/>
+                </a:solidFill>
+              </a:rPr>
+              <a:t>In one sentence</a:t>
+            </a:r>
+          </a:p>
+        </p:txBody>
+      </p:sp>
+      <p:sp>
+        <p:nvSpPr>
+          <p:cNvPr id="3" name="TextBox 2"/>
+          <p:cNvSpPr txBox="1"/>
+          <p:nvPr/>
+        </p:nvSpPr>
+        <p:spPr>
+          <a:xfrm>
+            <a:off x="457200" y="1280160"/>
+            <a:ext cx="11247120" cy="5303520"/>
+          </a:xfrm>
+          <a:prstGeom prst="rect">
+            <a:avLst/>
+          </a:prstGeom>
+          <a:noFill/>
+        </p:spPr>
+        <p:txBody>
+          <a:bodyPr wrap="square">
+            <a:spAutoFit/>
+          </a:bodyPr>
+          <a:lstStyle/>
+          <a:p>
+            <a:pPr>
+              <a:spcAft>
+                <a:spcPts val="600"/>
+              </a:spcAft>
+            </a:pPr>
+            <a:r>
+              <a:rPr sz="1800" i="1">
+                <a:solidFill>
+                  <a:srgbClr val="4A4A6E"/>
+                </a:solidFill>
+              </a:rPr>
+              <a:t>Your topics, drafted by AI, reviewed by your expert, learned by your team — at one-tenth the cost of doing it yourself.</a:t>
             </a:r>
           </a:p>
         </p:txBody>
@@ -6374,7 +7275,7 @@
                   <a:srgbClr val="1A1A2E"/>
                 </a:solidFill>
               </a:rPr>
-              <a:t>Security &amp; compliance</a:t>
+              <a:t>Outcomes — measured, not promised</a:t>
             </a:r>
           </a:p>
         </p:txBody>
@@ -6400,7 +7301,28 @@
             <a:spAutoFit/>
           </a:bodyPr>
           <a:lstStyle/>
-          <a:p/>
+          <a:p>
+            <a:pPr algn="l">
+              <a:spcAft>
+                <a:spcPts val="800"/>
+              </a:spcAft>
+            </a:pPr>
+            <a:r>
+              <a:rPr sz="1800"/>
+              <a:t>Most learning vendors report seat-time. We report against the Kirkpatrick four-level evaluation framework every quarter:</a:t>
+            </a:r>
+          </a:p>
+          <a:p>
+            <a:pPr algn="l">
+              <a:spcAft>
+                <a:spcPts val="800"/>
+              </a:spcAft>
+            </a:pPr>
+            <a:r>
+              <a:rPr sz="1800"/>
+              <a:t>We report against all four every quarter — not vanity metrics. If we miss a stated target, you see it before we do. Industry baseline for self-paced corporate completion: 12–15% (KPI Depot 2026). Our cohort target: ≥ 60%.</a:t>
+            </a:r>
+          </a:p>
         </p:txBody>
       </p:sp>
       <p:graphicFrame>
@@ -6412,8 +7334,8 @@
           <p:nvPr/>
         </p:nvGraphicFramePr>
         <p:xfrm>
-          <a:off x="457200" y="1828800"/>
-          <a:ext cx="11247120" cy="3291840"/>
+          <a:off x="457200" y="2240280"/>
+          <a:ext cx="11247120" cy="2057400"/>
         </p:xfrm>
         <a:graphic>
           <a:graphicData uri="http://schemas.openxmlformats.org/drawingml/2006/table">
@@ -6422,15 +7344,25 @@
                 <a:tableStyleId>{5C22544A-7EE6-4342-B048-85BDC9FD1C3A}</a:tableStyleId>
               </a:tblPr>
               <a:tblGrid>
-                <a:gridCol w="5623560"/>
-                <a:gridCol w="5623560"/>
+                <a:gridCol w="3749040"/>
+                <a:gridCol w="3749040"/>
+                <a:gridCol w="3749040"/>
               </a:tblGrid>
               <a:tr h="411480">
                 <a:tc>
                   <a:txBody>
                     <a:bodyPr/>
                     <a:lstStyle/>
-                    <a:p/>
+                    <a:p>
+                      <a:r>
+                        <a:rPr sz="1100" b="1">
+                          <a:solidFill>
+                            <a:srgbClr val="FFFFFF"/>
+                          </a:solidFill>
+                        </a:rPr>
+                        <a:t>Level</a:t>
+                      </a:r>
+                    </a:p>
                   </a:txBody>
                   <a:tcPr>
                     <a:solidFill>
@@ -6449,7 +7381,7 @@
                             <a:srgbClr val="FFFFFF"/>
                           </a:solidFill>
                         </a:rPr>
-                        <a:t>What we do</a:t>
+                        <a:t>What it measures</a:t>
                       </a:r>
                     </a:p>
                   </a:txBody>
@@ -6459,6 +7391,27 @@
                     </a:solidFill>
                   </a:tcPr>
                 </a:tc>
+                <a:tc>
+                  <a:txBody>
+                    <a:bodyPr/>
+                    <a:lstStyle/>
+                    <a:p>
+                      <a:r>
+                        <a:rPr sz="1100" b="1">
+                          <a:solidFill>
+                            <a:srgbClr val="FFFFFF"/>
+                          </a:solidFill>
+                        </a:rPr>
+                        <a:t>Our metric</a:t>
+                      </a:r>
+                    </a:p>
+                  </a:txBody>
+                  <a:tcPr>
+                    <a:solidFill>
+                      <a:srgbClr val="1A1A2E"/>
+                    </a:solidFill>
+                  </a:tcPr>
+                </a:tc>
               </a:tr>
               <a:tr h="411480">
                 <a:tc>
@@ -6468,20 +7421,33 @@
                     <a:p>
                       <a:r>
                         <a:rPr sz="1100"/>
-                        <a:t>Tenant isolation</a:t>
-                      </a:r>
-                    </a:p>
-                  </a:txBody>
-                  <a:tcPr/>
-                </a:tc>
-                <a:tc>
-                  <a:txBody>
-                    <a:bodyPr/>
-                    <a:lstStyle/>
-                    <a:p>
-                      <a:r>
-                        <a:rPr sz="1100"/>
-                        <a:t>Postgres row-level security; every query carries your tenant context; verified by integration test</a:t>
+                        <a:t>L1 — Reaction</a:t>
+                      </a:r>
+                    </a:p>
+                  </a:txBody>
+                  <a:tcPr/>
+                </a:tc>
+                <a:tc>
+                  <a:txBody>
+                    <a:bodyPr/>
+                    <a:lstStyle/>
+                    <a:p>
+                      <a:r>
+                        <a:rPr sz="1100"/>
+                        <a:t>Did learners value it?</a:t>
+                      </a:r>
+                    </a:p>
+                  </a:txBody>
+                  <a:tcPr/>
+                </a:tc>
+                <a:tc>
+                  <a:txBody>
+                    <a:bodyPr/>
+                    <a:lstStyle/>
+                    <a:p>
+                      <a:r>
+                        <a:rPr sz="1100"/>
+                        <a:t>NPS post-section; CES (effort score)</a:t>
                       </a:r>
                     </a:p>
                   </a:txBody>
@@ -6496,20 +7462,33 @@
                     <a:p>
                       <a:r>
                         <a:rPr sz="1100"/>
-                        <a:t>Audit log</a:t>
-                      </a:r>
-                    </a:p>
-                  </a:txBody>
-                  <a:tcPr/>
-                </a:tc>
-                <a:tc>
-                  <a:txBody>
-                    <a:bodyPr/>
-                    <a:lstStyle/>
-                    <a:p>
-                      <a:r>
-                        <a:rPr sz="1100"/>
-                        <a:t>Every publish, edit, and rejection is logged with author, timestamp, and reason</a:t>
+                        <a:t>L2 — Learning</a:t>
+                      </a:r>
+                    </a:p>
+                  </a:txBody>
+                  <a:tcPr/>
+                </a:tc>
+                <a:tc>
+                  <a:txBody>
+                    <a:bodyPr/>
+                    <a:lstStyle/>
+                    <a:p>
+                      <a:r>
+                        <a:rPr sz="1100"/>
+                        <a:t>Did they learn it?</a:t>
+                      </a:r>
+                    </a:p>
+                  </a:txBody>
+                  <a:tcPr/>
+                </a:tc>
+                <a:tc>
+                  <a:txBody>
+                    <a:bodyPr/>
+                    <a:lstStyle/>
+                    <a:p>
+                      <a:r>
+                        <a:rPr sz="1100"/>
+                        <a:t>Mock pass-rate trajectory; calibration Δ (how well learners' confidence matches outcomes — the metric that predicts real-job competence)</a:t>
                       </a:r>
                     </a:p>
                   </a:txBody>
@@ -6524,20 +7503,33 @@
                     <a:p>
                       <a:r>
                         <a:rPr sz="1100"/>
-                        <a:t>Data export</a:t>
-                      </a:r>
-                    </a:p>
-                  </a:txBody>
-                  <a:tcPr/>
-                </a:tc>
-                <a:tc>
-                  <a:txBody>
-                    <a:bodyPr/>
-                    <a:lstStyle/>
-                    <a:p>
-                      <a:r>
-                        <a:rPr sz="1100"/>
-                        <a:t>Self-serve CSV / JSON export of your tenant's content and learner progress</a:t>
+                        <a:t>L3 — Behaviour</a:t>
+                      </a:r>
+                    </a:p>
+                  </a:txBody>
+                  <a:tcPr/>
+                </a:tc>
+                <a:tc>
+                  <a:txBody>
+                    <a:bodyPr/>
+                    <a:lstStyle/>
+                    <a:p>
+                      <a:r>
+                        <a:rPr sz="1100"/>
+                        <a:t>Did they apply it?</a:t>
+                      </a:r>
+                    </a:p>
+                  </a:txBody>
+                  <a:tcPr/>
+                </a:tc>
+                <a:tc>
+                  <a:txBody>
+                    <a:bodyPr/>
+                    <a:lstStyle/>
+                    <a:p>
+                      <a:r>
+                        <a:rPr sz="1100"/>
+                        <a:t>Course-completion rate; D1 / D7 / D30 cohort retention curves; manager-survey self-report on observed behaviour change</a:t>
                       </a:r>
                     </a:p>
                   </a:txBody>
@@ -6552,104 +7544,33 @@
                     <a:p>
                       <a:r>
                         <a:rPr sz="1100"/>
-                        <a:t>Soft delete</a:t>
-                      </a:r>
-                    </a:p>
-                  </a:txBody>
-                  <a:tcPr/>
-                </a:tc>
-                <a:tc>
-                  <a:txBody>
-                    <a:bodyPr/>
-                    <a:lstStyle/>
-                    <a:p>
-                      <a:r>
-                        <a:rPr sz="1100"/>
-                        <a:t>Nothing is hard-deleted for 90 days; recoverable on request</a:t>
-                      </a:r>
-                    </a:p>
-                  </a:txBody>
-                  <a:tcPr/>
-                </a:tc>
-              </a:tr>
-              <a:tr h="411480">
-                <a:tc>
-                  <a:txBody>
-                    <a:bodyPr/>
-                    <a:lstStyle/>
-                    <a:p>
-                      <a:r>
-                        <a:rPr sz="1100"/>
-                        <a:t>AI provenance</a:t>
-                      </a:r>
-                    </a:p>
-                  </a:txBody>
-                  <a:tcPr/>
-                </a:tc>
-                <a:tc>
-                  <a:txBody>
-                    <a:bodyPr/>
-                    <a:lstStyle/>
-                    <a:p>
-                      <a:r>
-                        <a:rPr sz="1100"/>
-                        <a:t>Every published piece records its drafter, reviewer, validator results, and SME-approval evidence</a:t>
-                      </a:r>
-                    </a:p>
-                  </a:txBody>
-                  <a:tcPr/>
-                </a:tc>
-              </a:tr>
-              <a:tr h="411480">
-                <a:tc>
-                  <a:txBody>
-                    <a:bodyPr/>
-                    <a:lstStyle/>
-                    <a:p>
-                      <a:r>
-                        <a:rPr sz="1100"/>
-                        <a:t>SOC2</a:t>
-                      </a:r>
-                    </a:p>
-                  </a:txBody>
-                  <a:tcPr/>
-                </a:tc>
-                <a:tc>
-                  <a:txBody>
-                    <a:bodyPr/>
-                    <a:lstStyle/>
-                    <a:p>
-                      <a:r>
-                        <a:rPr sz="1100"/>
-                        <a:t>On the roadmap — formal audit triggered at 5 enterprise tenants. We can share our control matrix today.</a:t>
-                      </a:r>
-                    </a:p>
-                  </a:txBody>
-                  <a:tcPr/>
-                </a:tc>
-              </a:tr>
-              <a:tr h="411480">
-                <a:tc>
-                  <a:txBody>
-                    <a:bodyPr/>
-                    <a:lstStyle/>
-                    <a:p>
-                      <a:r>
-                        <a:rPr sz="1100"/>
-                        <a:t>GDPR</a:t>
-                      </a:r>
-                    </a:p>
-                  </a:txBody>
-                  <a:tcPr/>
-                </a:tc>
-                <a:tc>
-                  <a:txBody>
-                    <a:bodyPr/>
-                    <a:lstStyle/>
-                    <a:p>
-                      <a:r>
-                        <a:rPr sz="1100"/>
-                        <a:t>Designed in (data-export, right-to-be-forgotten); EU hosting available</a:t>
+                        <a:t>L4 — Results</a:t>
+                      </a:r>
+                    </a:p>
+                  </a:txBody>
+                  <a:tcPr/>
+                </a:tc>
+                <a:tc>
+                  <a:txBody>
+                    <a:bodyPr/>
+                    <a:lstStyle/>
+                    <a:p>
+                      <a:r>
+                        <a:rPr sz="1100"/>
+                        <a:t>Did the business benefit?</a:t>
+                      </a:r>
+                    </a:p>
+                  </a:txBody>
+                  <a:tcPr/>
+                </a:tc>
+                <a:tc>
+                  <a:txBody>
+                    <a:bodyPr/>
+                    <a:lstStyle/>
+                    <a:p>
+                      <a:r>
+                        <a:rPr sz="1100"/>
+                        <a:t>Compliance / certification pass-rate; for regulated tenants, audit-finding deltas</a:t>
                       </a:r>
                     </a:p>
                   </a:txBody>
@@ -6707,7 +7628,7 @@
                   <a:srgbClr val="1A1A2E"/>
                 </a:solidFill>
               </a:rPr>
-              <a:t>Single sign-on &amp; integration</a:t>
+              <a:t>How we make your SMEs effective</a:t>
             </a:r>
           </a:p>
         </p:txBody>
@@ -6734,17 +7655,14 @@
           </a:bodyPr>
           <a:lstStyle/>
           <a:p>
-            <a:pPr/>
-            <a:r>
-              <a:rPr sz="1600"/>
-              <a:t>Clerk Enterprise — SAML, SCIM, OIDC. Your IT team configures once.</a:t>
-            </a:r>
-          </a:p>
-          <a:p>
-            <a:pPr/>
-            <a:r>
-              <a:rPr sz="1600"/>
-              <a:t>Webhooks — completion events to your HRIS / Workday / BambooHR.</a:t>
+            <a:pPr algn="l">
+              <a:spcAft>
+                <a:spcPts val="800"/>
+              </a:spcAft>
+            </a:pPr>
+            <a:r>
+              <a:rPr sz="1800"/>
+              <a:t>Subject-matter experts know their material. Most can't teach it without specific scaffolding — Cognitive Task Analysis research finds SMEs omit ~70% of decisions when self-narrating complex tasks (Clark, Feldon, van Merriënboer, Yates &amp; Early). We close that gap:</a:t>
             </a:r>
           </a:p>
           <a:p>
@@ -6755,7 +7673,106 @@
             </a:pPr>
             <a:r>
               <a:rPr sz="1600"/>
-              <a:t>API — read-only export endpoints for your data warehouse.</a:t>
+              <a:t>CTA intake script — five required probes (novice-error /</a:t>
+            </a:r>
+          </a:p>
+          <a:p>
+            <a:pPr algn="l">
+              <a:spcAft>
+                <a:spcPts val="800"/>
+              </a:spcAft>
+            </a:pPr>
+            <a:r>
+              <a:rPr sz="1800"/>
+              <a:t>one-principle / worked-example pair / boundary case / nearest confusable). No SME-narration of expertise; SME answers structured questions instead. Lee 2004: +46% post-training learning gain on CTA-built instruction vs expert-narrated, Cohen's d ≈ 1.72.</a:t>
+            </a:r>
+          </a:p>
+          <a:p>
+            <a:pPr>
+              <a:spcAft>
+                <a:spcPts val="600"/>
+              </a:spcAft>
+            </a:pPr>
+            <a:r>
+              <a:rPr sz="1600"/>
+              <a:t>Backward-design template — write the assessment first, then the</a:t>
+            </a:r>
+          </a:p>
+          <a:p>
+            <a:pPr algn="l">
+              <a:spcAft>
+                <a:spcPts val="800"/>
+              </a:spcAft>
+            </a:pPr>
+            <a:r>
+              <a:rPr sz="1800"/>
+              <a:t>lesson. Eliminates unmeasurable lessons. (Wiggins &amp; McTighe 1998 — Understanding by Design.)</a:t>
+            </a:r>
+          </a:p>
+          <a:p>
+            <a:pPr>
+              <a:spcAft>
+                <a:spcPts val="600"/>
+              </a:spcAft>
+            </a:pPr>
+            <a:r>
+              <a:rPr sz="1600"/>
+              <a:t>Worked-example pair required — mandatory field, not optional</a:t>
+            </a:r>
+          </a:p>
+          <a:p>
+            <a:pPr algn="l">
+              <a:spcAft>
+                <a:spcPts val="800"/>
+              </a:spcAft>
+            </a:pPr>
+            <a:r>
+              <a:rPr sz="1800"/>
+              <a:t>enrichment. (Sweller, van Merriënboer &amp; Paas 2019.)</a:t>
+            </a:r>
+          </a:p>
+          <a:p>
+            <a:pPr>
+              <a:spcAft>
+                <a:spcPts val="600"/>
+              </a:spcAft>
+            </a:pPr>
+            <a:r>
+              <a:rPr sz="1600"/>
+              <a:t>Expert-blind-spot prompt at submission — "what would a novice get</a:t>
+            </a:r>
+          </a:p>
+          <a:p>
+            <a:pPr algn="l">
+              <a:spcAft>
+                <a:spcPts val="800"/>
+              </a:spcAft>
+            </a:pPr>
+            <a:r>
+              <a:rPr sz="1800"/>
+              <a:t>wrong here?" (Nathan &amp; Petrosino 2003 — expert blind spot.)</a:t>
+            </a:r>
+          </a:p>
+          <a:p>
+            <a:pPr>
+              <a:spcAft>
+                <a:spcPts val="600"/>
+              </a:spcAft>
+            </a:pPr>
+            <a:r>
+              <a:rPr sz="1600"/>
+              <a:t>≤ 1-hour SME-to-publishable-lesson commitment. End-to-end intake</a:t>
+            </a:r>
+          </a:p>
+          <a:p>
+            <a:pPr algn="l">
+              <a:spcAft>
+                <a:spcPts val="800"/>
+              </a:spcAft>
+            </a:pPr>
+            <a:r>
+              <a:rPr sz="1800"/>
+              <a:t>→ critic → publishable. We hold ourselves to it.</a:t>
             </a:r>
           </a:p>
         </p:txBody>

--- a/plans/deck-b2b-prospect.pptx
+++ b/plans/deck-b2b-prospect.pptx
@@ -26,6 +26,7 @@
     <p:sldId id="274" r:id="rId25"/>
     <p:sldId id="275" r:id="rId26"/>
     <p:sldId id="276" r:id="rId27"/>
+    <p:sldId id="277" r:id="rId28"/>
   </p:sldIdLst>
   <p:sldSz cx="12191695" cy="6858000" type="screen4x3"/>
   <p:notesSz cx="6858000" cy="9144000"/>
@@ -3228,6 +3229,191 @@
                   <a:srgbClr val="1A1A2E"/>
                 </a:solidFill>
               </a:rPr>
+              <a:t>Your three problems → our three answers</a:t>
+            </a:r>
+          </a:p>
+        </p:txBody>
+      </p:sp>
+      <p:sp>
+        <p:nvSpPr>
+          <p:cNvPr id="3" name="TextBox 2"/>
+          <p:cNvSpPr txBox="1"/>
+          <p:nvPr/>
+        </p:nvSpPr>
+        <p:spPr>
+          <a:xfrm>
+            <a:off x="457200" y="1280160"/>
+            <a:ext cx="11247120" cy="5303520"/>
+          </a:xfrm>
+          <a:prstGeom prst="rect">
+            <a:avLst/>
+          </a:prstGeom>
+          <a:noFill/>
+        </p:spPr>
+        <p:txBody>
+          <a:bodyPr wrap="square">
+            <a:spAutoFit/>
+          </a:bodyPr>
+          <a:lstStyle/>
+          <a:p>
+            <a:pPr algn="l">
+              <a:spcAft>
+                <a:spcPts val="800"/>
+              </a:spcAft>
+            </a:pPr>
+            <a:r>
+              <a:rPr sz="1800"/>
+              <a:t>Buyer-language summary. Every answer is a shipped feature in the platform with a named research source — not a slide-ware promise.</a:t>
+            </a:r>
+          </a:p>
+          <a:p>
+            <a:pPr algn="l">
+              <a:spcAft>
+                <a:spcPts val="800"/>
+              </a:spcAft>
+            </a:pPr>
+            <a:r>
+              <a:rPr sz="1800"/>
+              <a:t>Problem 1 — Your learners forget what they learned. Industry self- paced course-completion is 12–15%, and even completers retain ~25% of content by day 6 without review.</a:t>
+            </a:r>
+          </a:p>
+          <a:p>
+            <a:pPr algn="l">
+              <a:spcAft>
+                <a:spcPts val="800"/>
+              </a:spcAft>
+            </a:pPr>
+            <a:r>
+              <a:rPr sz="1800"/>
+              <a:t>→ Our answer. A spaced-review banner on every learner's dashboard with one-tap start; expanding-interval scheduling (1/3/7/14/30d); web- push reminders anchored to the learner's own modal study-time; cohort surface for the relatedness lift that converts MOOC 3–10% completion to cohort 75–96%.</a:t>
+            </a:r>
+          </a:p>
+          <a:p>
+            <a:pPr algn="l">
+              <a:spcAft>
+                <a:spcPts val="800"/>
+              </a:spcAft>
+            </a:pPr>
+            <a:r>
+              <a:rPr sz="1800"/>
+              <a:t>→ Sources. Cepeda et al. 2008 Psych Sci (~2× retention vs massed practice); Roediger &amp; Karpicke 2006 (~50% lift on retrieval practice); Maven / Reich &amp; Ruipérez-Valiente 2019 Science (cohort effect); Mazal 2022 / Duolingo (CURR +21%, DAU 4.5× from streak design).</a:t>
+            </a:r>
+          </a:p>
+          <a:p>
+            <a:pPr algn="l">
+              <a:spcAft>
+                <a:spcPts val="800"/>
+              </a:spcAft>
+            </a:pPr>
+            <a:r>
+              <a:rPr sz="1800"/>
+              <a:t>Problem 2 — Your SMEs are experts but not teachers. They know the material. They can't transfer it. Cognitive Task Analysis research finds they omit ~70% of decisions when self-narrating, so the resulting instruction is ~46% less effective than CTA-built equivalents (Lee 2004, Cohen's d ≈ 1.72).</a:t>
+            </a:r>
+          </a:p>
+          <a:p>
+            <a:pPr algn="l">
+              <a:spcAft>
+                <a:spcPts val="800"/>
+              </a:spcAft>
+            </a:pPr>
+            <a:r>
+              <a:rPr sz="1800"/>
+              <a:t>→ Our answer. A 5-probe CTA-style intake (novice-error / one- principle / worked-example pair / boundary case / nearest confusable) that the admin app requires — your SMEs answer five structured questions instead of writing prose. Backward-design "write the test first" mode locks the lesson editor until a passing assessment is authored. Voice-first / camera-first capture for shop-floor SMEs whose knowledge is tacit (Polanyi 1966). Per-SME blind-spot dashboard surfaces patterns over time so SMEs self-correct.</a:t>
+            </a:r>
+          </a:p>
+          <a:p>
+            <a:pPr algn="l">
+              <a:spcAft>
+                <a:spcPts val="800"/>
+              </a:spcAft>
+            </a:pPr>
+            <a:r>
+              <a:rPr sz="1800"/>
+              <a:t>→ Sources. Clark, Feldon, van Merriënboer, Yates &amp; Early (CTA); Wiggins &amp; McTighe 1998 (backward design); Sweller / Renkl (worked- example fading); Nathan &amp; Petrosino 2003 (expert blind spot); Ericsson 1993 (deliberate-practice feedback channel).</a:t>
+            </a:r>
+          </a:p>
+          <a:p>
+            <a:pPr algn="l">
+              <a:spcAft>
+                <a:spcPts val="800"/>
+              </a:spcAft>
+            </a:pPr>
+            <a:r>
+              <a:rPr sz="1800"/>
+              <a:t>Problem 3 — You can't tell whether your learning programme works. Most LMS vendors report seat-time and completion. Neither predicts on-the-job competence; both can be gamed.</a:t>
+            </a:r>
+          </a:p>
+          <a:p>
+            <a:pPr algn="l">
+              <a:spcAft>
+                <a:spcPts val="800"/>
+              </a:spcAft>
+            </a:pPr>
+            <a:r>
+              <a:rPr sz="1800"/>
+              <a:t>→ Our answer. Kirkpatrick L1–L4 reporting every quarter. The load-bearing metric is calibration Δ — how well learner confidence matches outcomes; it predicts real-job competence in a way completion does not. &lt; 70% completion correlates with 3.5× compliance-violation rate in regulated industries (KPI Depot 2026), so this is not vanity measurement — it monetises directly through reduced incident cost.</a:t>
+            </a:r>
+          </a:p>
+          <a:p>
+            <a:pPr algn="l">
+              <a:spcAft>
+                <a:spcPts val="800"/>
+              </a:spcAft>
+            </a:pPr>
+            <a:r>
+              <a:rPr sz="1800"/>
+              <a:t>→ Sources. Kirkpatrick 1959 / 2016 four-level framework; Dunlosky &amp; Bjork (calibration / JOL); Kruger &amp; Dunning 1999 (self-assessment miscalibration); KPI Depot 2026 (compliance baseline).</a:t>
+            </a:r>
+          </a:p>
+        </p:txBody>
+      </p:sp>
+    </p:spTree>
+  </p:cSld>
+  <p:clrMapOvr>
+    <a:masterClrMapping/>
+  </p:clrMapOvr>
+</p:sld>
+</file>
+
+<file path=ppt/slides/slide11.xml><?xml version="1.0" encoding="utf-8"?>
+<p:sld xmlns:a="http://schemas.openxmlformats.org/drawingml/2006/main" xmlns:p="http://schemas.openxmlformats.org/presentationml/2006/main" xmlns:r="http://schemas.openxmlformats.org/officeDocument/2006/relationships">
+  <p:cSld>
+    <p:spTree>
+      <p:nvGrpSpPr>
+        <p:cNvPr id="1" name=""/>
+        <p:cNvGrpSpPr/>
+        <p:nvPr/>
+      </p:nvGrpSpPr>
+      <p:grpSpPr/>
+      <p:sp>
+        <p:nvSpPr>
+          <p:cNvPr id="2" name="TextBox 1"/>
+          <p:cNvSpPr txBox="1"/>
+          <p:nvPr/>
+        </p:nvSpPr>
+        <p:spPr>
+          <a:xfrm>
+            <a:off x="457200" y="274320"/>
+            <a:ext cx="11247120" cy="914400"/>
+          </a:xfrm>
+          <a:prstGeom prst="rect">
+            <a:avLst/>
+          </a:prstGeom>
+          <a:noFill/>
+        </p:spPr>
+        <p:txBody>
+          <a:bodyPr wrap="square">
+            <a:spAutoFit/>
+          </a:bodyPr>
+          <a:lstStyle/>
+          <a:p>
+            <a:pPr algn="l"/>
+            <a:r>
+              <a:rPr sz="2800" b="1">
+                <a:solidFill>
+                  <a:srgbClr val="1A1A2E"/>
+                </a:solidFill>
+              </a:rPr>
               <a:t>We already know your segment's failure mode</a:t>
             </a:r>
           </a:p>
@@ -3654,7 +3840,7 @@
 </p:sld>
 </file>
 
-<file path=ppt/slides/slide11.xml><?xml version="1.0" encoding="utf-8"?>
+<file path=ppt/slides/slide12.xml><?xml version="1.0" encoding="utf-8"?>
 <p:sld xmlns:a="http://schemas.openxmlformats.org/drawingml/2006/main" xmlns:p="http://schemas.openxmlformats.org/presentationml/2006/main" xmlns:r="http://schemas.openxmlformats.org/officeDocument/2006/relationships">
   <p:cSld>
     <p:spTree>
@@ -3987,7 +4173,7 @@
 </p:sld>
 </file>
 
-<file path=ppt/slides/slide12.xml><?xml version="1.0" encoding="utf-8"?>
+<file path=ppt/slides/slide13.xml><?xml version="1.0" encoding="utf-8"?>
 <p:sld xmlns:a="http://schemas.openxmlformats.org/drawingml/2006/main" xmlns:p="http://schemas.openxmlformats.org/presentationml/2006/main" xmlns:r="http://schemas.openxmlformats.org/officeDocument/2006/relationships">
   <p:cSld>
     <p:spTree>
@@ -4087,7 +4273,7 @@
 </p:sld>
 </file>
 
-<file path=ppt/slides/slide13.xml><?xml version="1.0" encoding="utf-8"?>
+<file path=ppt/slides/slide14.xml><?xml version="1.0" encoding="utf-8"?>
 <p:sld xmlns:a="http://schemas.openxmlformats.org/drawingml/2006/main" xmlns:p="http://schemas.openxmlformats.org/presentationml/2006/main" xmlns:r="http://schemas.openxmlformats.org/officeDocument/2006/relationships">
   <p:cSld>
     <p:spTree>
@@ -4413,7 +4599,7 @@
 </p:sld>
 </file>
 
-<file path=ppt/slides/slide14.xml><?xml version="1.0" encoding="utf-8"?>
+<file path=ppt/slides/slide15.xml><?xml version="1.0" encoding="utf-8"?>
 <p:sld xmlns:a="http://schemas.openxmlformats.org/drawingml/2006/main" xmlns:p="http://schemas.openxmlformats.org/presentationml/2006/main" xmlns:r="http://schemas.openxmlformats.org/officeDocument/2006/relationships">
   <p:cSld>
     <p:spTree>
@@ -4725,7 +4911,7 @@
 </p:sld>
 </file>
 
-<file path=ppt/slides/slide15.xml><?xml version="1.0" encoding="utf-8"?>
+<file path=ppt/slides/slide16.xml><?xml version="1.0" encoding="utf-8"?>
 <p:sld xmlns:a="http://schemas.openxmlformats.org/drawingml/2006/main" xmlns:p="http://schemas.openxmlformats.org/presentationml/2006/main" xmlns:r="http://schemas.openxmlformats.org/officeDocument/2006/relationships">
   <p:cSld>
     <p:spTree>
@@ -5067,7 +5253,7 @@
 </p:sld>
 </file>
 
-<file path=ppt/slides/slide16.xml><?xml version="1.0" encoding="utf-8"?>
+<file path=ppt/slides/slide17.xml><?xml version="1.0" encoding="utf-8"?>
 <p:sld xmlns:a="http://schemas.openxmlformats.org/drawingml/2006/main" xmlns:p="http://schemas.openxmlformats.org/presentationml/2006/main" xmlns:r="http://schemas.openxmlformats.org/officeDocument/2006/relationships">
   <p:cSld>
     <p:spTree>
@@ -5431,7 +5617,7 @@
 </p:sld>
 </file>
 
-<file path=ppt/slides/slide17.xml><?xml version="1.0" encoding="utf-8"?>
+<file path=ppt/slides/slide18.xml><?xml version="1.0" encoding="utf-8"?>
 <p:sld xmlns:a="http://schemas.openxmlformats.org/drawingml/2006/main" xmlns:p="http://schemas.openxmlformats.org/presentationml/2006/main" xmlns:r="http://schemas.openxmlformats.org/officeDocument/2006/relationships">
   <p:cSld>
     <p:spTree>
@@ -5795,7 +5981,7 @@
 </p:sld>
 </file>
 
-<file path=ppt/slides/slide18.xml><?xml version="1.0" encoding="utf-8"?>
+<file path=ppt/slides/slide19.xml><?xml version="1.0" encoding="utf-8"?>
 <p:sld xmlns:a="http://schemas.openxmlformats.org/drawingml/2006/main" xmlns:p="http://schemas.openxmlformats.org/presentationml/2006/main" xmlns:r="http://schemas.openxmlformats.org/officeDocument/2006/relationships">
   <p:cSld>
     <p:spTree>
@@ -5912,125 +6098,6 @@
             <a:r>
               <a:rPr sz="1800"/>
               <a:t>That's it. No code changes on your side. SSO is optional during the pilot.</a:t>
-            </a:r>
-          </a:p>
-        </p:txBody>
-      </p:sp>
-    </p:spTree>
-  </p:cSld>
-  <p:clrMapOvr>
-    <a:masterClrMapping/>
-  </p:clrMapOvr>
-</p:sld>
-</file>
-
-<file path=ppt/slides/slide19.xml><?xml version="1.0" encoding="utf-8"?>
-<p:sld xmlns:a="http://schemas.openxmlformats.org/drawingml/2006/main" xmlns:p="http://schemas.openxmlformats.org/presentationml/2006/main" xmlns:r="http://schemas.openxmlformats.org/officeDocument/2006/relationships">
-  <p:cSld>
-    <p:spTree>
-      <p:nvGrpSpPr>
-        <p:cNvPr id="1" name=""/>
-        <p:cNvGrpSpPr/>
-        <p:nvPr/>
-      </p:nvGrpSpPr>
-      <p:grpSpPr/>
-      <p:sp>
-        <p:nvSpPr>
-          <p:cNvPr id="2" name="TextBox 1"/>
-          <p:cNvSpPr txBox="1"/>
-          <p:nvPr/>
-        </p:nvSpPr>
-        <p:spPr>
-          <a:xfrm>
-            <a:off x="457200" y="274320"/>
-            <a:ext cx="11247120" cy="914400"/>
-          </a:xfrm>
-          <a:prstGeom prst="rect">
-            <a:avLst/>
-          </a:prstGeom>
-          <a:noFill/>
-        </p:spPr>
-        <p:txBody>
-          <a:bodyPr wrap="square">
-            <a:spAutoFit/>
-          </a:bodyPr>
-          <a:lstStyle/>
-          <a:p>
-            <a:pPr algn="l"/>
-            <a:r>
-              <a:rPr sz="2800" b="1">
-                <a:solidFill>
-                  <a:srgbClr val="1A1A2E"/>
-                </a:solidFill>
-              </a:rPr>
-              <a:t>Frequently asked questions</a:t>
-            </a:r>
-          </a:p>
-        </p:txBody>
-      </p:sp>
-      <p:sp>
-        <p:nvSpPr>
-          <p:cNvPr id="3" name="TextBox 2"/>
-          <p:cNvSpPr txBox="1"/>
-          <p:nvPr/>
-        </p:nvSpPr>
-        <p:spPr>
-          <a:xfrm>
-            <a:off x="457200" y="1280160"/>
-            <a:ext cx="11247120" cy="5303520"/>
-          </a:xfrm>
-          <a:prstGeom prst="rect">
-            <a:avLst/>
-          </a:prstGeom>
-          <a:noFill/>
-        </p:spPr>
-        <p:txBody>
-          <a:bodyPr wrap="square">
-            <a:spAutoFit/>
-          </a:bodyPr>
-          <a:lstStyle/>
-          <a:p>
-            <a:pPr algn="l">
-              <a:spcAft>
-                <a:spcPts val="800"/>
-              </a:spcAft>
-            </a:pPr>
-            <a:r>
-              <a:rPr sz="1800"/>
-              <a:t>"What if your AI gets something wrong?" Two safety nets: deterministic validators catch documented failure modes pre-review, and your SME is the publish gate. Bad content cannot reach your staff without your SME approving it.</a:t>
-            </a:r>
-          </a:p>
-          <a:p>
-            <a:pPr algn="l">
-              <a:spcAft>
-                <a:spcPts val="800"/>
-              </a:spcAft>
-            </a:pPr>
-            <a:r>
-              <a:rPr sz="1800"/>
-              <a:t>"What happens to our content if we leave?" Self-serve export of all your content and learner progress. Tenant deletion within 30 days of request.</a:t>
-            </a:r>
-          </a:p>
-          <a:p>
-            <a:pPr algn="l">
-              <a:spcAft>
-                <a:spcPts val="800"/>
-              </a:spcAft>
-            </a:pPr>
-            <a:r>
-              <a:rPr sz="1800"/>
-              <a:t>"Are our knowledge files used to train any AI models?" No. We use Anthropic's API in zero-data-retention mode for enterprise tenants; your files are used only to draft content for your tenant.</a:t>
-            </a:r>
-          </a:p>
-          <a:p>
-            <a:pPr algn="l">
-              <a:spcAft>
-                <a:spcPts val="800"/>
-              </a:spcAft>
-            </a:pPr>
-            <a:r>
-              <a:rPr sz="1800"/>
-              <a:t>"Can we run this air-gapped / on-prem?" Not in v1. On-prem is on the 18-month roadmap if 3+ enterprise prospects request it.</a:t>
             </a:r>
           </a:p>
         </p:txBody>
@@ -6179,7 +6246,7 @@
                   <a:srgbClr val="1A1A2E"/>
                 </a:solidFill>
               </a:rPr>
-              <a:t>Next step</a:t>
+              <a:t>Frequently asked questions</a:t>
             </a:r>
           </a:p>
         </p:txBody>
@@ -6213,32 +6280,7 @@
             </a:pPr>
             <a:r>
               <a:rPr sz="1800"/>
-              <a:t>A 30-minute scoping call to determine:</a:t>
-            </a:r>
-          </a:p>
-          <a:p>
-            <a:pPr/>
-            <a:r>
-              <a:rPr sz="1600"/>
-              <a:t>Which 1–3 catalogs would matter most to your team?</a:t>
-            </a:r>
-          </a:p>
-          <a:p>
-            <a:pPr/>
-            <a:r>
-              <a:rPr sz="1600"/>
-              <a:t>Who would be your SME?</a:t>
-            </a:r>
-          </a:p>
-          <a:p>
-            <a:pPr>
-              <a:spcAft>
-                <a:spcPts val="600"/>
-              </a:spcAft>
-            </a:pPr>
-            <a:r>
-              <a:rPr sz="1600"/>
-              <a:t>What does pilot success look like to you?</a:t>
+              <a:t>"What if your AI gets something wrong?" Two safety nets: deterministic validators catch documented failure modes pre-review, and your SME is the publish gate. Bad content cannot reach your staff without your SME approving it.</a:t>
             </a:r>
           </a:p>
           <a:p>
@@ -6249,7 +6291,7 @@
             </a:pPr>
             <a:r>
               <a:rPr sz="1800"/>
-              <a:t>If we agree it's worth a pilot, we send an LOI within 48 hours.</a:t>
+              <a:t>"What happens to our content if we leave?" Self-serve export of all your content and learner progress. Tenant deletion within 30 days of request.</a:t>
             </a:r>
           </a:p>
           <a:p>
@@ -6260,7 +6302,18 @@
             </a:pPr>
             <a:r>
               <a:rPr sz="1800"/>
-              <a:t>Contact: [operator email] • [scheduling link]</a:t>
+              <a:t>"Are our knowledge files used to train any AI models?" No. We use Anthropic's API in zero-data-retention mode for enterprise tenants; your files are used only to draft content for your tenant.</a:t>
+            </a:r>
+          </a:p>
+          <a:p>
+            <a:pPr algn="l">
+              <a:spcAft>
+                <a:spcPts val="800"/>
+              </a:spcAft>
+            </a:pPr>
+            <a:r>
+              <a:rPr sz="1800"/>
+              <a:t>"Can we run this air-gapped / on-prem?" Not in v1. On-prem is on the 18-month roadmap if 3+ enterprise prospects request it.</a:t>
             </a:r>
           </a:p>
         </p:txBody>
@@ -6274,6 +6327,139 @@
 </file>
 
 <file path=ppt/slides/slide21.xml><?xml version="1.0" encoding="utf-8"?>
+<p:sld xmlns:a="http://schemas.openxmlformats.org/drawingml/2006/main" xmlns:p="http://schemas.openxmlformats.org/presentationml/2006/main" xmlns:r="http://schemas.openxmlformats.org/officeDocument/2006/relationships">
+  <p:cSld>
+    <p:spTree>
+      <p:nvGrpSpPr>
+        <p:cNvPr id="1" name=""/>
+        <p:cNvGrpSpPr/>
+        <p:nvPr/>
+      </p:nvGrpSpPr>
+      <p:grpSpPr/>
+      <p:sp>
+        <p:nvSpPr>
+          <p:cNvPr id="2" name="TextBox 1"/>
+          <p:cNvSpPr txBox="1"/>
+          <p:nvPr/>
+        </p:nvSpPr>
+        <p:spPr>
+          <a:xfrm>
+            <a:off x="457200" y="274320"/>
+            <a:ext cx="11247120" cy="914400"/>
+          </a:xfrm>
+          <a:prstGeom prst="rect">
+            <a:avLst/>
+          </a:prstGeom>
+          <a:noFill/>
+        </p:spPr>
+        <p:txBody>
+          <a:bodyPr wrap="square">
+            <a:spAutoFit/>
+          </a:bodyPr>
+          <a:lstStyle/>
+          <a:p>
+            <a:pPr algn="l"/>
+            <a:r>
+              <a:rPr sz="2800" b="1">
+                <a:solidFill>
+                  <a:srgbClr val="1A1A2E"/>
+                </a:solidFill>
+              </a:rPr>
+              <a:t>Next step</a:t>
+            </a:r>
+          </a:p>
+        </p:txBody>
+      </p:sp>
+      <p:sp>
+        <p:nvSpPr>
+          <p:cNvPr id="3" name="TextBox 2"/>
+          <p:cNvSpPr txBox="1"/>
+          <p:nvPr/>
+        </p:nvSpPr>
+        <p:spPr>
+          <a:xfrm>
+            <a:off x="457200" y="1280160"/>
+            <a:ext cx="11247120" cy="5303520"/>
+          </a:xfrm>
+          <a:prstGeom prst="rect">
+            <a:avLst/>
+          </a:prstGeom>
+          <a:noFill/>
+        </p:spPr>
+        <p:txBody>
+          <a:bodyPr wrap="square">
+            <a:spAutoFit/>
+          </a:bodyPr>
+          <a:lstStyle/>
+          <a:p>
+            <a:pPr algn="l">
+              <a:spcAft>
+                <a:spcPts val="800"/>
+              </a:spcAft>
+            </a:pPr>
+            <a:r>
+              <a:rPr sz="1800"/>
+              <a:t>A 30-minute scoping call to determine:</a:t>
+            </a:r>
+          </a:p>
+          <a:p>
+            <a:pPr/>
+            <a:r>
+              <a:rPr sz="1600"/>
+              <a:t>Which 1–3 catalogs would matter most to your team?</a:t>
+            </a:r>
+          </a:p>
+          <a:p>
+            <a:pPr/>
+            <a:r>
+              <a:rPr sz="1600"/>
+              <a:t>Who would be your SME?</a:t>
+            </a:r>
+          </a:p>
+          <a:p>
+            <a:pPr>
+              <a:spcAft>
+                <a:spcPts val="600"/>
+              </a:spcAft>
+            </a:pPr>
+            <a:r>
+              <a:rPr sz="1600"/>
+              <a:t>What does pilot success look like to you?</a:t>
+            </a:r>
+          </a:p>
+          <a:p>
+            <a:pPr algn="l">
+              <a:spcAft>
+                <a:spcPts val="800"/>
+              </a:spcAft>
+            </a:pPr>
+            <a:r>
+              <a:rPr sz="1800"/>
+              <a:t>If we agree it's worth a pilot, we send an LOI within 48 hours.</a:t>
+            </a:r>
+          </a:p>
+          <a:p>
+            <a:pPr algn="l">
+              <a:spcAft>
+                <a:spcPts val="800"/>
+              </a:spcAft>
+            </a:pPr>
+            <a:r>
+              <a:rPr sz="1800"/>
+              <a:t>Contact: [operator email] • [scheduling link]</a:t>
+            </a:r>
+          </a:p>
+        </p:txBody>
+      </p:sp>
+    </p:spTree>
+  </p:cSld>
+  <p:clrMapOvr>
+    <a:masterClrMapping/>
+  </p:clrMapOvr>
+</p:sld>
+</file>
+
+<file path=ppt/slides/slide22.xml><?xml version="1.0" encoding="utf-8"?>
 <p:sld xmlns:a="http://schemas.openxmlformats.org/drawingml/2006/main" xmlns:p="http://schemas.openxmlformats.org/presentationml/2006/main" xmlns:r="http://schemas.openxmlformats.org/officeDocument/2006/relationships">
   <p:cSld>
     <p:spTree>

--- a/plans/deck-b2b-prospect.pptx
+++ b/plans/deck-b2b-prospect.pptx
@@ -3363,6 +3363,17 @@
             <a:r>
               <a:rPr sz="1800"/>
               <a:t>→ Sources. Kirkpatrick 1959 / 2016 four-level framework; Dunlosky &amp; Bjork (calibration / JOL); Kruger &amp; Dunning 1999 (self-assessment miscalibration); KPI Depot 2026 (compliance baseline).</a:t>
+            </a:r>
+          </a:p>
+          <a:p>
+            <a:pPr algn="l">
+              <a:spcAft>
+                <a:spcPts val="800"/>
+              </a:spcAft>
+            </a:pPr>
+            <a:r>
+              <a:rPr sz="1800"/>
+              <a:t>Full evidentiary basis (industry data, peer-reviewed research, problem-by-problem mitigation walkthrough with falsification triggers) in research-and-strategy-dossier.md.</a:t>
             </a:r>
           </a:p>
         </p:txBody>
